--- a/納品レポート/ホテル別レポート/コンフォートホテルERA東京東神田_口コミ分析レポート.pptx
+++ b/納品レポート/ホテル別レポート/コンフォートホテルERA東京東神田_口コミ分析レポート.pptx
@@ -214,16 +214,16 @@
                   <c:v>10</c:v>
                 </c:pt>
                 <c:pt idx="2">
-                  <c:v>9.81</c:v>
+                  <c:v>9.79</c:v>
                 </c:pt>
                 <c:pt idx="3">
                   <c:v>8.91</c:v>
                 </c:pt>
                 <c:pt idx="4">
-                  <c:v>8.67</c:v>
+                  <c:v>8.8</c:v>
                 </c:pt>
                 <c:pt idx="5">
-                  <c:v>7.82</c:v>
+                  <c:v>7</c:v>
                 </c:pt>
               </c:numCache>
             </c:numRef>
@@ -528,10 +528,10 @@
               <c:numCache>
                 <c:ptCount val="2"/>
                 <c:pt idx="0">
-                  <c:v>109</c:v>
+                  <c:v>59</c:v>
                 </c:pt>
                 <c:pt idx="1">
-                  <c:v>11</c:v>
+                  <c:v>3</c:v>
                 </c:pt>
               </c:numCache>
             </c:numRef>
@@ -716,33 +716,11 @@
               <a:effectLst/>
             </c:spPr>
           </c:dPt>
-          <c:dPt>
-            <c:idx val="7"/>
-            <c:invertIfNegative val="0"/>
-            <c:bubble3D val="0"/>
-            <c:spPr>
-              <a:solidFill>
-                <a:srgbClr val="16A34A"/>
-              </a:solidFill>
-              <a:effectLst/>
-            </c:spPr>
-          </c:dPt>
-          <c:dPt>
-            <c:idx val="8"/>
-            <c:invertIfNegative val="0"/>
-            <c:bubble3D val="0"/>
-            <c:spPr>
-              <a:solidFill>
-                <a:srgbClr val="16A34A"/>
-              </a:solidFill>
-              <a:effectLst/>
-            </c:spPr>
-          </c:dPt>
           <c:cat>
             <c:multiLvlStrRef>
-              <c:f>Sheet1!$A$2:$A$10</c:f>
+              <c:f>Sheet1!$A$2:$A$8</c:f>
               <c:multiLvlStrCache>
-                <c:ptCount val="9"/>
+                <c:ptCount val="7"/>
                 <c:lvl>
                   <c:pt idx="0">
                     <c:v>10点</c:v>
@@ -757,18 +735,12 @@
                     <c:v>7点</c:v>
                   </c:pt>
                   <c:pt idx="4">
-                    <c:v>6点</c:v>
+                    <c:v>4点</c:v>
                   </c:pt>
                   <c:pt idx="5">
-                    <c:v>5点</c:v>
+                    <c:v>3点</c:v>
                   </c:pt>
                   <c:pt idx="6">
-                    <c:v>4点</c:v>
-                  </c:pt>
-                  <c:pt idx="7">
-                    <c:v>3点</c:v>
-                  </c:pt>
-                  <c:pt idx="8">
                     <c:v>2点</c:v>
                   </c:pt>
                 </c:lvl>
@@ -777,35 +749,29 @@
           </c:cat>
           <c:val>
             <c:numRef>
-              <c:f>Sheet1!$B$2:$B$10</c:f>
+              <c:f>Sheet1!$B$2:$B$8</c:f>
               <c:numCache>
                 <c:formatCode>General</c:formatCode>
-                <c:ptCount val="9"/>
+                <c:ptCount val="7"/>
                 <c:pt idx="0">
-                  <c:v>72</c:v>
+                  <c:v>39</c:v>
                 </c:pt>
                 <c:pt idx="1">
-                  <c:v>15</c:v>
+                  <c:v>4</c:v>
                 </c:pt>
                 <c:pt idx="2">
-                  <c:v>22</c:v>
+                  <c:v>16</c:v>
                 </c:pt>
                 <c:pt idx="3">
-                  <c:v>7</c:v>
+                  <c:v>3</c:v>
                 </c:pt>
                 <c:pt idx="4">
-                  <c:v>3</c:v>
+                  <c:v>1</c:v>
                 </c:pt>
                 <c:pt idx="5">
                   <c:v>1</c:v>
                 </c:pt>
                 <c:pt idx="6">
-                  <c:v>1</c:v>
-                </c:pt>
-                <c:pt idx="7">
-                  <c:v>1</c:v>
-                </c:pt>
-                <c:pt idx="8">
                   <c:v>3</c:v>
                 </c:pt>
               </c:numCache>
@@ -2737,7 +2703,7 @@
                 <a:ea typeface="Arial" pitchFamily="34" charset="-122"/>
                 <a:cs typeface="Arial" pitchFamily="34" charset="-120"/>
               </a:rPr>
-              <a:t>分析対象期間：2025年12月〜2026年3月</a:t>
+              <a:t>分析対象期間：2025年12月〜2026年4月</a:t>
             </a:r>
             <a:endParaRPr lang="en-US" sz="1000" dirty="0"/>
           </a:p>
@@ -2757,7 +2723,7 @@
                 <a:ea typeface="Arial" pitchFamily="34" charset="-122"/>
                 <a:cs typeface="Arial" pitchFamily="34" charset="-120"/>
               </a:rPr>
-              <a:t>レビュー総数：125件</a:t>
+              <a:t>レビュー総数：67件</a:t>
             </a:r>
             <a:endParaRPr lang="en-US" sz="1000" dirty="0"/>
           </a:p>
@@ -2777,7 +2743,7 @@
                 <a:ea typeface="Arial" pitchFamily="34" charset="-122"/>
                 <a:cs typeface="Arial" pitchFamily="34" charset="-120"/>
               </a:rPr>
-              <a:t>作成日：2026年4月3日</a:t>
+              <a:t>作成日：2026年4月12日</a:t>
             </a:r>
             <a:endParaRPr lang="en-US" sz="1000" dirty="0"/>
           </a:p>
@@ -2956,7 +2922,7 @@
                 <a:ea typeface="Arial" pitchFamily="34" charset="-122"/>
                 <a:cs typeface="Arial" pitchFamily="34" charset="-120"/>
               </a:rPr>
-              <a:t>コンフォートホテルERA東京東神田の2025年12月〜2026年3月口コミ分析（125件）では、総合評価8.93点（10pt換算）、高評価率87.2%という結果が得られました。</a:t>
+              <a:t>コンフォートホテルERA東京東神田の2025年12月〜2026年4月口コミ分析（67件）では、総合評価8.78点（10pt換算）、高評価率88.1%という結果が得られました。</a:t>
             </a:r>
             <a:endParaRPr lang="en-US" sz="1200" dirty="0"/>
           </a:p>
@@ -3014,7 +2980,7 @@
                 <a:ea typeface="Arial" pitchFamily="34" charset="-122"/>
                 <a:cs typeface="Arial" pitchFamily="34" charset="-120"/>
               </a:rPr>
-              <a:t>6ヶ月以内に全体平均9.2点以上、高評価率92%以上を目指し、継続的な改善サイクルを確立することを推奨します。</a:t>
+              <a:t>6ヶ月以内に全体平均9.1点以上、高評価率93%以上を目指し、継続的な改善サイクルを確立することを推奨します。</a:t>
             </a:r>
             <a:endParaRPr lang="en-US" sz="1200" dirty="0"/>
           </a:p>
@@ -3360,7 +3326,7 @@
                 <a:ea typeface="Arial" pitchFamily="34" charset="-122"/>
                 <a:cs typeface="Arial" pitchFamily="34" charset="-120"/>
               </a:rPr>
-              <a:t>8.93</a:t>
+              <a:t>8.78</a:t>
             </a:r>
             <a:endParaRPr lang="en-US" sz="3200" dirty="0"/>
           </a:p>
@@ -3485,7 +3451,7 @@
                 <a:ea typeface="Arial" pitchFamily="34" charset="-122"/>
                 <a:cs typeface="Arial" pitchFamily="34" charset="-120"/>
               </a:rPr>
-              <a:t>87.2%</a:t>
+              <a:t>88.1%</a:t>
             </a:r>
             <a:endParaRPr lang="en-US" sz="3200" dirty="0"/>
           </a:p>
@@ -3610,7 +3576,7 @@
                 <a:ea typeface="Arial" pitchFamily="34" charset="-122"/>
                 <a:cs typeface="Arial" pitchFamily="34" charset="-120"/>
               </a:rPr>
-              <a:t>4.0%</a:t>
+              <a:t>7.5%</a:t>
             </a:r>
             <a:endParaRPr lang="en-US" sz="3200" dirty="0"/>
           </a:p>
@@ -3735,7 +3701,7 @@
                 <a:ea typeface="Arial" pitchFamily="34" charset="-122"/>
                 <a:cs typeface="Arial" pitchFamily="34" charset="-120"/>
               </a:rPr>
-              <a:t>125件</a:t>
+              <a:t>67件</a:t>
             </a:r>
             <a:endParaRPr lang="en-US" sz="3200" dirty="0"/>
           </a:p>
@@ -3883,7 +3849,7 @@
                 <a:ea typeface="Arial" pitchFamily="34" charset="-122"/>
                 <a:cs typeface="Arial" pitchFamily="34" charset="-120"/>
               </a:rPr>
-              <a:t>  駅近・交通利便性に関する好評価（49件）</a:t>
+              <a:t>  駅近・交通利便性に関する好評価（31件）</a:t>
             </a:r>
             <a:endParaRPr lang="en-US" sz="1100" dirty="0"/>
           </a:p>
@@ -3923,7 +3889,7 @@
                 <a:ea typeface="Arial" pitchFamily="34" charset="-122"/>
                 <a:cs typeface="Arial" pitchFamily="34" charset="-120"/>
               </a:rPr>
-              <a:t>  客室の快適性・設備の充実度への好評（38件）</a:t>
+              <a:t>  客室の快適性・設備の充実度への好評（23件）</a:t>
             </a:r>
             <a:endParaRPr lang="en-US" sz="1100" dirty="0"/>
           </a:p>
@@ -3963,7 +3929,7 @@
                 <a:ea typeface="Arial" pitchFamily="34" charset="-122"/>
                 <a:cs typeface="Arial" pitchFamily="34" charset="-120"/>
               </a:rPr>
-              <a:t>  フロントスタッフの丁寧な対応への好評（29件）</a:t>
+              <a:t>  フロントスタッフの丁寧な対応への好評（18件）</a:t>
             </a:r>
             <a:endParaRPr lang="en-US" sz="1100" dirty="0"/>
           </a:p>
@@ -4111,7 +4077,7 @@
                 <a:ea typeface="Arial" pitchFamily="34" charset="-122"/>
                 <a:cs typeface="Arial" pitchFamily="34" charset="-120"/>
               </a:rPr>
-              <a:t>  4件の指摘あり。改善対応を推奨</a:t>
+              <a:t>  2件の指摘あり。改善対応を推奨</a:t>
             </a:r>
             <a:endParaRPr lang="en-US" sz="1100" dirty="0"/>
           </a:p>
@@ -4661,7 +4627,7 @@
                 <a:ea typeface="Arial" pitchFamily="34" charset="-122"/>
                 <a:cs typeface="Arial" pitchFamily="34" charset="-120"/>
               </a:rPr>
-              <a:t>8.93点（10pt換算）</a:t>
+              <a:t>8.78点（10pt換算）</a:t>
             </a:r>
             <a:endParaRPr lang="en-US" sz="1100" dirty="0"/>
           </a:p>
@@ -5170,7 +5136,7 @@
                           <a:ea typeface="Arial" pitchFamily="34" charset="-122"/>
                           <a:cs typeface="Arial" pitchFamily="34" charset="-120"/>
                         </a:rPr>
-                        <a:t>2</a:t>
+                        <a:t>1</a:t>
                       </a:r>
                       <a:endParaRPr lang="en-US" sz="900" dirty="0">
                         <a:latin typeface="Arial" charset="0"/>
@@ -5512,7 +5478,7 @@
                           <a:ea typeface="Arial" pitchFamily="34" charset="-122"/>
                           <a:cs typeface="Arial" pitchFamily="34" charset="-120"/>
                         </a:rPr>
-                        <a:t>2</a:t>
+                        <a:t>1</a:t>
                       </a:r>
                       <a:endParaRPr lang="en-US" sz="900" dirty="0">
                         <a:latin typeface="Arial" charset="0"/>
@@ -5854,7 +5820,7 @@
                           <a:ea typeface="Arial" pitchFamily="34" charset="-122"/>
                           <a:cs typeface="Arial" pitchFamily="34" charset="-120"/>
                         </a:rPr>
-                        <a:t>26</a:t>
+                        <a:t>14</a:t>
                       </a:r>
                       <a:endParaRPr lang="en-US" sz="900" dirty="0">
                         <a:latin typeface="Arial" charset="0"/>
@@ -5922,7 +5888,7 @@
                           <a:ea typeface="Arial" pitchFamily="34" charset="-122"/>
                           <a:cs typeface="Arial" pitchFamily="34" charset="-120"/>
                         </a:rPr>
-                        <a:t>9.81</a:t>
+                        <a:t>9.79</a:t>
                       </a:r>
                       <a:endParaRPr lang="en-US" sz="900" dirty="0">
                         <a:latin typeface="Arial" charset="0"/>
@@ -6058,7 +6024,7 @@
                           <a:ea typeface="Arial" pitchFamily="34" charset="-122"/>
                           <a:cs typeface="Arial" pitchFamily="34" charset="-120"/>
                         </a:rPr>
-                        <a:t>9.81</a:t>
+                        <a:t>9.79</a:t>
                       </a:r>
                       <a:endParaRPr lang="en-US" sz="900" dirty="0">
                         <a:latin typeface="Arial" charset="0"/>
@@ -6196,7 +6162,7 @@
                           <a:ea typeface="Arial" pitchFamily="34" charset="-122"/>
                           <a:cs typeface="Arial" pitchFamily="34" charset="-120"/>
                         </a:rPr>
-                        <a:t>67</a:t>
+                        <a:t>34</a:t>
                       </a:r>
                       <a:endParaRPr lang="en-US" sz="900" dirty="0">
                         <a:latin typeface="Arial" charset="0"/>
@@ -6538,7 +6504,7 @@
                           <a:ea typeface="Arial" pitchFamily="34" charset="-122"/>
                           <a:cs typeface="Arial" pitchFamily="34" charset="-120"/>
                         </a:rPr>
-                        <a:t>6</a:t>
+                        <a:t>5</a:t>
                       </a:r>
                       <a:endParaRPr lang="en-US" sz="900" dirty="0">
                         <a:latin typeface="Arial" charset="0"/>
@@ -6606,7 +6572,7 @@
                           <a:ea typeface="Arial" pitchFamily="34" charset="-122"/>
                           <a:cs typeface="Arial" pitchFamily="34" charset="-120"/>
                         </a:rPr>
-                        <a:t>4.33</a:t>
+                        <a:t>4.40</a:t>
                       </a:r>
                       <a:endParaRPr lang="en-US" sz="900" dirty="0">
                         <a:latin typeface="Arial" charset="0"/>
@@ -6742,7 +6708,7 @@
                           <a:ea typeface="Arial" pitchFamily="34" charset="-122"/>
                           <a:cs typeface="Arial" pitchFamily="34" charset="-120"/>
                         </a:rPr>
-                        <a:t>8.67</a:t>
+                        <a:t>8.80</a:t>
                       </a:r>
                       <a:endParaRPr lang="en-US" sz="900" dirty="0">
                         <a:latin typeface="Arial" charset="0"/>
@@ -6880,7 +6846,7 @@
                           <a:ea typeface="Arial" pitchFamily="34" charset="-122"/>
                           <a:cs typeface="Arial" pitchFamily="34" charset="-120"/>
                         </a:rPr>
-                        <a:t>22</a:t>
+                        <a:t>12</a:t>
                       </a:r>
                       <a:endParaRPr lang="en-US" sz="900" dirty="0">
                         <a:latin typeface="Arial" charset="0"/>
@@ -6948,7 +6914,7 @@
                           <a:ea typeface="Arial" pitchFamily="34" charset="-122"/>
                           <a:cs typeface="Arial" pitchFamily="34" charset="-120"/>
                         </a:rPr>
-                        <a:t>3.91</a:t>
+                        <a:t>3.50</a:t>
                       </a:r>
                       <a:endParaRPr lang="en-US" sz="900" dirty="0">
                         <a:latin typeface="Arial" charset="0"/>
@@ -7084,7 +7050,7 @@
                           <a:ea typeface="Arial" pitchFamily="34" charset="-122"/>
                           <a:cs typeface="Arial" pitchFamily="34" charset="-120"/>
                         </a:rPr>
-                        <a:t>7.82</a:t>
+                        <a:t>7.00</a:t>
                       </a:r>
                       <a:endParaRPr lang="en-US" sz="900" dirty="0">
                         <a:latin typeface="Arial" charset="0"/>
@@ -7492,7 +7458,7 @@
                 <a:ea typeface="Arial" pitchFamily="34" charset="-122"/>
                 <a:cs typeface="Arial" pitchFamily="34" charset="-120"/>
               </a:rPr>
-              <a:t>109件（87.2%）</a:t>
+              <a:t>59件（88.1%）</a:t>
             </a:r>
             <a:endParaRPr lang="en-US" sz="1100" dirty="0"/>
           </a:p>
@@ -7590,7 +7556,7 @@
                 <a:ea typeface="Arial" pitchFamily="34" charset="-122"/>
                 <a:cs typeface="Arial" pitchFamily="34" charset="-120"/>
               </a:rPr>
-              <a:t>11件（8.8%）</a:t>
+              <a:t>3件（4.5%）</a:t>
             </a:r>
             <a:endParaRPr lang="en-US" sz="1100" dirty="0"/>
           </a:p>
@@ -7688,7 +7654,7 @@
                 <a:ea typeface="Arial" pitchFamily="34" charset="-122"/>
                 <a:cs typeface="Arial" pitchFamily="34" charset="-120"/>
               </a:rPr>
-              <a:t>5件（4.0%）</a:t>
+              <a:t>5件（7.5%）</a:t>
             </a:r>
             <a:endParaRPr lang="en-US" sz="1100" dirty="0"/>
           </a:p>
@@ -8022,7 +7988,7 @@
                 <a:ea typeface="Arial" pitchFamily="34" charset="-122"/>
                 <a:cs typeface="Arial" pitchFamily="34" charset="-120"/>
               </a:rPr>
-              <a:t>49件</a:t>
+              <a:t>31件</a:t>
             </a:r>
             <a:endParaRPr lang="en-US" sz="900" dirty="0"/>
           </a:p>
@@ -8245,7 +8211,7 @@
                 <a:ea typeface="Arial" pitchFamily="34" charset="-122"/>
                 <a:cs typeface="Arial" pitchFamily="34" charset="-120"/>
               </a:rPr>
-              <a:t>38件</a:t>
+              <a:t>23件</a:t>
             </a:r>
             <a:endParaRPr lang="en-US" sz="900" dirty="0"/>
           </a:p>
@@ -8468,7 +8434,7 @@
                 <a:ea typeface="Arial" pitchFamily="34" charset="-122"/>
                 <a:cs typeface="Arial" pitchFamily="34" charset="-120"/>
               </a:rPr>
-              <a:t>29件</a:t>
+              <a:t>18件</a:t>
             </a:r>
             <a:endParaRPr lang="en-US" sz="900" dirty="0"/>
           </a:p>
@@ -8691,7 +8657,7 @@
                 <a:ea typeface="Arial" pitchFamily="34" charset="-122"/>
                 <a:cs typeface="Arial" pitchFamily="34" charset="-120"/>
               </a:rPr>
-              <a:t>27件</a:t>
+              <a:t>14件</a:t>
             </a:r>
             <a:endParaRPr lang="en-US" sz="900" dirty="0"/>
           </a:p>
@@ -8730,7 +8696,7 @@
                 <a:ea typeface="Arial" pitchFamily="34" charset="-122"/>
                 <a:cs typeface="Arial" pitchFamily="34" charset="-120"/>
               </a:rPr>
-              <a:t>朝食</a:t>
+              <a:t>清潔感</a:t>
             </a:r>
             <a:endParaRPr lang="en-US" sz="1300" dirty="0"/>
           </a:p>
@@ -8769,7 +8735,7 @@
                 <a:ea typeface="Arial" pitchFamily="34" charset="-122"/>
                 <a:cs typeface="Arial" pitchFamily="34" charset="-120"/>
               </a:rPr>
-              <a:t>朝食の品質・バリエーションへの高評価</a:t>
+              <a:t>客室・共用部の清潔さへの高評価</a:t>
             </a:r>
             <a:endParaRPr lang="en-US" sz="900" dirty="0"/>
           </a:p>
@@ -8808,7 +8774,7 @@
                 <a:ea typeface="Arial" pitchFamily="34" charset="-122"/>
                 <a:cs typeface="Arial" pitchFamily="34" charset="-120"/>
               </a:rPr>
-              <a:t>「ops. Breakfast was great.」</a:t>
+              <a:t>「屋も風呂も清潔で適度に広く、過ごしやすかったです。朝食も野菜」</a:t>
             </a:r>
             <a:endParaRPr lang="en-US" sz="900" dirty="0"/>
           </a:p>
@@ -8914,7 +8880,7 @@
                 <a:ea typeface="Arial" pitchFamily="34" charset="-122"/>
                 <a:cs typeface="Arial" pitchFamily="34" charset="-120"/>
               </a:rPr>
-              <a:t>21件</a:t>
+              <a:t>14件</a:t>
             </a:r>
             <a:endParaRPr lang="en-US" sz="900" dirty="0"/>
           </a:p>
@@ -8953,7 +8919,7 @@
                 <a:ea typeface="Arial" pitchFamily="34" charset="-122"/>
                 <a:cs typeface="Arial" pitchFamily="34" charset="-120"/>
               </a:rPr>
-              <a:t>清潔感</a:t>
+              <a:t>朝食</a:t>
             </a:r>
             <a:endParaRPr lang="en-US" sz="1300" dirty="0"/>
           </a:p>
@@ -8992,7 +8958,7 @@
                 <a:ea typeface="Arial" pitchFamily="34" charset="-122"/>
                 <a:cs typeface="Arial" pitchFamily="34" charset="-120"/>
               </a:rPr>
-              <a:t>客室・共用部の清潔さへの高評価</a:t>
+              <a:t>朝食の品質・バリエーションへの高評価</a:t>
             </a:r>
             <a:endParaRPr lang="en-US" sz="900" dirty="0"/>
           </a:p>
@@ -9031,7 +8997,7 @@
                 <a:ea typeface="Arial" pitchFamily="34" charset="-122"/>
                 <a:cs typeface="Arial" pitchFamily="34" charset="-120"/>
               </a:rPr>
-              <a:t>「屋も風呂も清潔で適度に広く、過ごしやすかったです。朝食も野菜」</a:t>
+              <a:t>「ops. Breakfast was great.」</a:t>
             </a:r>
             <a:endParaRPr lang="en-US" sz="900" dirty="0"/>
           </a:p>
@@ -9802,13 +9768,13 @@
                       <a:r>
                         <a:rPr lang="en-US" sz="1200" b="1" dirty="0">
                           <a:solidFill>
-                            <a:srgbClr val="DC2626"/>
+                            <a:srgbClr val="EA580C"/>
                           </a:solidFill>
                           <a:latin typeface="Arial" pitchFamily="34" charset="0"/>
                           <a:ea typeface="Arial" pitchFamily="34" charset="-122"/>
                           <a:cs typeface="Arial" pitchFamily="34" charset="-120"/>
                         </a:rPr>
-                        <a:t>S</a:t>
+                        <a:t>A</a:t>
                       </a:r>
                       <a:endParaRPr lang="en-US" sz="1200" dirty="0">
                         <a:latin typeface="Arial" charset="0"/>
@@ -10012,7 +9978,7 @@
                           <a:ea typeface="Arial" pitchFamily="34" charset="-122"/>
                           <a:cs typeface="Arial" pitchFamily="34" charset="-120"/>
                         </a:rPr>
-                        <a:t>4件</a:t>
+                        <a:t>2件</a:t>
                       </a:r>
                       <a:endParaRPr lang="en-US" sz="900" dirty="0">
                         <a:latin typeface="Arial" charset="0"/>
@@ -13801,7 +13767,7 @@
                           <a:ea typeface="Arial" pitchFamily="34" charset="-122"/>
                           <a:cs typeface="Arial" pitchFamily="34" charset="-120"/>
                         </a:rPr>
-                        <a:t>8.93点</a:t>
+                        <a:t>8.78点</a:t>
                       </a:r>
                       <a:endParaRPr lang="en-US" sz="1000" dirty="0">
                         <a:latin typeface="Arial" charset="0"/>
@@ -13869,7 +13835,7 @@
                           <a:ea typeface="Arial" pitchFamily="34" charset="-122"/>
                           <a:cs typeface="Arial" pitchFamily="34" charset="-120"/>
                         </a:rPr>
-                        <a:t>9.2点以上</a:t>
+                        <a:t>9.1点以上</a:t>
                       </a:r>
                       <a:endParaRPr lang="en-US" sz="1000" dirty="0">
                         <a:latin typeface="Arial" charset="0"/>
@@ -14075,7 +14041,7 @@
                           <a:ea typeface="Arial" pitchFamily="34" charset="-122"/>
                           <a:cs typeface="Arial" pitchFamily="34" charset="-120"/>
                         </a:rPr>
-                        <a:t>87.2%</a:t>
+                        <a:t>88.1%</a:t>
                       </a:r>
                       <a:endParaRPr lang="en-US" sz="1000" dirty="0">
                         <a:latin typeface="Arial" charset="0"/>
@@ -14143,7 +14109,7 @@
                           <a:ea typeface="Arial" pitchFamily="34" charset="-122"/>
                           <a:cs typeface="Arial" pitchFamily="34" charset="-120"/>
                         </a:rPr>
-                        <a:t>92%以上</a:t>
+                        <a:t>93%以上</a:t>
                       </a:r>
                       <a:endParaRPr lang="en-US" sz="1000" dirty="0">
                         <a:latin typeface="Arial" charset="0"/>
@@ -14349,7 +14315,7 @@
                           <a:ea typeface="Arial" pitchFamily="34" charset="-122"/>
                           <a:cs typeface="Arial" pitchFamily="34" charset="-120"/>
                         </a:rPr>
-                        <a:t>4.0%</a:t>
+                        <a:t>7.5%</a:t>
                       </a:r>
                       <a:endParaRPr lang="en-US" sz="1000" dirty="0">
                         <a:latin typeface="Arial" charset="0"/>
@@ -14417,7 +14383,7 @@
                           <a:ea typeface="Arial" pitchFamily="34" charset="-122"/>
                           <a:cs typeface="Arial" pitchFamily="34" charset="-120"/>
                         </a:rPr>
-                        <a:t>3.0%以下</a:t>
+                        <a:t>6.5%以下</a:t>
                       </a:r>
                       <a:endParaRPr lang="en-US" sz="1000" dirty="0">
                         <a:latin typeface="Arial" charset="0"/>
